--- a/slides/pptx/week17.pptx
+++ b/slides/pptx/week17.pptx
@@ -1501,7 +1501,7 @@
       </p:grpSpPr>
       <p:pic>
         <p:nvPicPr>
-          <p:cNvPr id="2" name="Image 0" descr="/private/tmp/claude-501/-Users-pop7-Library-CloudStorage-OneDrive-MonsterConnectCo--Ltd-Lecture-KOSEN69---software-security/e6d6556f-17de-403d-a9a0-cf2f846149b4/scratchpad/tree/slides/pptx/assets/logo-small.png">    </p:cNvPr>
+          <p:cNvPr id="2" name="Image 0" descr="/private/tmp/claude-501/-Users-pop7-Library-CloudStorage-OneDrive-MonsterConnectCo--Ltd-Lecture-KOSEN69---software-security/f63a82af-e1ad-40ed-89c4-03c6ca776e3f/scratchpad/lq-docs/slides/pptx/assets/logo-small.png">    </p:cNvPr>
           <p:cNvPicPr>
             <a:picLocks noChangeAspect="1"/>
           </p:cNvPicPr>
@@ -1922,7 +1922,7 @@
       </p:sp>
       <p:pic>
         <p:nvPicPr>
-          <p:cNvPr id="8" name="Image 1" descr="/private/tmp/claude-501/-Users-pop7-Library-CloudStorage-OneDrive-MonsterConnectCo--Ltd-Lecture-KOSEN69---software-security/e6d6556f-17de-403d-a9a0-cf2f846149b4/scratchpad/tree/slides/pptx/assets/logo-small.png">    </p:cNvPr>
+          <p:cNvPr id="8" name="Image 1" descr="/private/tmp/claude-501/-Users-pop7-Library-CloudStorage-OneDrive-MonsterConnectCo--Ltd-Lecture-KOSEN69---software-security/f63a82af-e1ad-40ed-89c4-03c6ca776e3f/scratchpad/lq-docs/slides/pptx/assets/logo-small.png">    </p:cNvPr>
           <p:cNvPicPr>
             <a:picLocks noChangeAspect="1"/>
           </p:cNvPicPr>
@@ -2131,7 +2131,7 @@
       </p:sp>
       <p:pic>
         <p:nvPicPr>
-          <p:cNvPr id="7" name="Image 2" descr="/private/tmp/claude-501/-Users-pop7-Library-CloudStorage-OneDrive-MonsterConnectCo--Ltd-Lecture-KOSEN69---software-security/e6d6556f-17de-403d-a9a0-cf2f846149b4/scratchpad/tree/slides/pptx/assets/logo-small.png">    </p:cNvPr>
+          <p:cNvPr id="7" name="Image 2" descr="/private/tmp/claude-501/-Users-pop7-Library-CloudStorage-OneDrive-MonsterConnectCo--Ltd-Lecture-KOSEN69---software-security/f63a82af-e1ad-40ed-89c4-03c6ca776e3f/scratchpad/lq-docs/slides/pptx/assets/logo-small.png">    </p:cNvPr>
           <p:cNvPicPr>
             <a:picLocks noChangeAspect="1"/>
           </p:cNvPicPr>
@@ -2759,7 +2759,7 @@
       </p:sp>
       <p:pic>
         <p:nvPicPr>
-          <p:cNvPr id="8" name="Image 1" descr="/private/tmp/claude-501/-Users-pop7-Library-CloudStorage-OneDrive-MonsterConnectCo--Ltd-Lecture-KOSEN69---software-security/e6d6556f-17de-403d-a9a0-cf2f846149b4/scratchpad/tree/slides/pptx/assets/logo-small.png">    </p:cNvPr>
+          <p:cNvPr id="8" name="Image 1" descr="/private/tmp/claude-501/-Users-pop7-Library-CloudStorage-OneDrive-MonsterConnectCo--Ltd-Lecture-KOSEN69---software-security/f63a82af-e1ad-40ed-89c4-03c6ca776e3f/scratchpad/lq-docs/slides/pptx/assets/logo-small.png">    </p:cNvPr>
           <p:cNvPicPr>
             <a:picLocks noChangeAspect="1"/>
           </p:cNvPicPr>
@@ -3101,7 +3101,7 @@
       </p:sp>
       <p:pic>
         <p:nvPicPr>
-          <p:cNvPr id="9" name="Image 1" descr="/private/tmp/claude-501/-Users-pop7-Library-CloudStorage-OneDrive-MonsterConnectCo--Ltd-Lecture-KOSEN69---software-security/e6d6556f-17de-403d-a9a0-cf2f846149b4/scratchpad/tree/slides/pptx/assets/logo-small.png">    </p:cNvPr>
+          <p:cNvPr id="9" name="Image 1" descr="/private/tmp/claude-501/-Users-pop7-Library-CloudStorage-OneDrive-MonsterConnectCo--Ltd-Lecture-KOSEN69---software-security/f63a82af-e1ad-40ed-89c4-03c6ca776e3f/scratchpad/lq-docs/slides/pptx/assets/logo-small.png">    </p:cNvPr>
           <p:cNvPicPr>
             <a:picLocks noChangeAspect="1"/>
           </p:cNvPicPr>
@@ -3360,7 +3360,7 @@
       </p:sp>
       <p:pic>
         <p:nvPicPr>
-          <p:cNvPr id="8" name="Image 1" descr="/private/tmp/claude-501/-Users-pop7-Library-CloudStorage-OneDrive-MonsterConnectCo--Ltd-Lecture-KOSEN69---software-security/e6d6556f-17de-403d-a9a0-cf2f846149b4/scratchpad/tree/slides/pptx/assets/logo-small.png">    </p:cNvPr>
+          <p:cNvPr id="8" name="Image 1" descr="/private/tmp/claude-501/-Users-pop7-Library-CloudStorage-OneDrive-MonsterConnectCo--Ltd-Lecture-KOSEN69---software-security/f63a82af-e1ad-40ed-89c4-03c6ca776e3f/scratchpad/lq-docs/slides/pptx/assets/logo-small.png">    </p:cNvPr>
           <p:cNvPicPr>
             <a:picLocks noChangeAspect="1"/>
           </p:cNvPicPr>
@@ -3593,7 +3593,7 @@
                 <a:ea typeface="Calibri" pitchFamily="34" charset="-122"/>
                 <a:cs typeface="Calibri" pitchFamily="34" charset="-120"/>
               </a:rPr>
-              <a:t>Wk 19: capstone CTF tournament + final project demos (video walkthrough submitted before the session + a short live Q&amp;A — not a live demo slot)</a:t>
+              <a:t>Wk 19: capstone CTF tournament + final project demos (video walkthrough linked in the report, due with it; live Q&amp;A only if the instructor calls your team)</a:t>
             </a:r>
             <a:endParaRPr lang="en-US" sz="1400" dirty="0"/>
           </a:p>
@@ -3640,7 +3640,7 @@
       </p:sp>
       <p:pic>
         <p:nvPicPr>
-          <p:cNvPr id="8" name="Image 1" descr="/private/tmp/claude-501/-Users-pop7-Library-CloudStorage-OneDrive-MonsterConnectCo--Ltd-Lecture-KOSEN69---software-security/e6d6556f-17de-403d-a9a0-cf2f846149b4/scratchpad/tree/slides/pptx/assets/logo-small.png">    </p:cNvPr>
+          <p:cNvPr id="8" name="Image 1" descr="/private/tmp/claude-501/-Users-pop7-Library-CloudStorage-OneDrive-MonsterConnectCo--Ltd-Lecture-KOSEN69---software-security/f63a82af-e1ad-40ed-89c4-03c6ca776e3f/scratchpad/lq-docs/slides/pptx/assets/logo-small.png">    </p:cNvPr>
           <p:cNvPicPr>
             <a:picLocks noChangeAspect="1"/>
           </p:cNvPicPr>
@@ -3774,7 +3774,7 @@
       </p:sp>
       <p:pic>
         <p:nvPicPr>
-          <p:cNvPr id="4" name="Image 0" descr="/private/tmp/claude-501/-Users-pop7-Library-CloudStorage-OneDrive-MonsterConnectCo--Ltd-Lecture-KOSEN69---software-security/e6d6556f-17de-403d-a9a0-cf2f846149b4/scratchpad/tree/slides/pptx/assets/logo-small.png">    </p:cNvPr>
+          <p:cNvPr id="4" name="Image 0" descr="/private/tmp/claude-501/-Users-pop7-Library-CloudStorage-OneDrive-MonsterConnectCo--Ltd-Lecture-KOSEN69---software-security/f63a82af-e1ad-40ed-89c4-03c6ca776e3f/scratchpad/lq-docs/slides/pptx/assets/logo-small.png">    </p:cNvPr>
           <p:cNvPicPr>
             <a:picLocks noChangeAspect="1"/>
           </p:cNvPicPr>

--- a/slides/pptx/week17.pptx
+++ b/slides/pptx/week17.pptx
@@ -12,10 +12,9 @@
     <p:sldId id="260" r:id="rId6"/>
     <p:sldId id="261" r:id="rId7"/>
     <p:sldId id="262" r:id="rId8"/>
-    <p:sldId id="263" r:id="rId9"/>
   </p:sldIdLst>
   <p:notesMasterIdLst>
-    <p:notesMasterId r:id="rId10"/>
+    <p:notesMasterId r:id="rId9"/>
   </p:notesMasterIdLst>
   <p:sldSz cx="9144000" cy="5143500"/>
   <p:notesSz cx="5143500" cy="9144000"/>
@@ -774,7 +773,7 @@
           <a:p>
             <a:r>
               <a:rPr lang="en-US" dirty="0"/>
-              <a:t>Same run as W7 but whole-course. Seed questions from exams/item-bank.md (final pool). Weight the board toward DevSecOps and first-half callbacks, not more API questions — the mock CTF right after this covers API well; it has ZERO DevSecOps or Capstone coverage, and DevSecOps alone is 15 of the Wk18 written exam's 100 marks. Say this gap out loud to the room. Teams = Houses; Final-Jeopardy wager; points to the CTFd board. ~75 min.</a:t>
+              <a:t>Same run as W7 but whole-course. Seed questions from exams/item-bank.md (final pool). Weight the board toward DevSecOps and first-half callbacks, not more API questions — the mock CTF right after this covers API well; it has ZERO DevSecOps or Capstone coverage, yet DevSecOps is 15 of the Wk18 written exam's 100 marks and W19 challenge #14 (Break the Build, 15 pts). Say this gap out loud to the room. Teams = Houses; Final-Jeopardy wager; points to the CTFd board. ~75 min.</a:t>
             </a:r>
             <a:endParaRPr lang="en-US" dirty="0"/>
           </a:p>
@@ -862,7 +861,7 @@
           <a:p>
             <a:r>
               <a:rPr lang="en-US" dirty="0"/>
-              <a:t>Correct the "same format" framing head-on — this course's own lesson-plan notes exist specifically because instructors kept saying "same as the final" and it isn't. Also correct a second, easy-to-repeat mistake: don't say "W19 is 25% of the final grade" — the 25% is the combined W18+W19 average; W19 alone is roughly half that. And don't imply DevSecOps/Capstone show up in W19 either — neither ctf.md nor the mock ever tests them, they're W18-written-only. Run mock-ctf.md / CTF pool, incl. a binary (toolbox container) + LLM challenge. Budget: 150 min per AGENDA (quiz 30 + Jeopardy 75 + break 15 + mock 150 + debrief 30 = 300 total) — not 90, that's a 60-min undercount that will visibly break the room's pacing. ~150 min.</a:t>
+              <a:t>Correct the "same format" framing head-on — this course's own lesson-plan notes exist specifically because instructors kept saying "same as the final" and it isn't. Also correct a second, easy-to-repeat mistake: don't say "W19 is 25% of the final grade" — the 25% is the combined W18+W19 average; W19 alone is roughly half that. And don't imply DevSecOps is W18-only: ctf.md's #14 Break the Build (15 pts, Week 15's fail-open /admin) is a W19 challenge, though the mock never tests it. The capstone itself is not a CTF topic — it's the graded project demo. Run mock-ctf.md / CTF pool, incl. a binary (toolbox container) + LLM challenge. Budget: 150 min per AGENDA (quiz 30 + Jeopardy 75 + break 15 + mock 150 + debrief 30 = 300 total) — not 90, that's a 60-min undercount that will visibly break the room's pacing. ~150 min.</a:t>
             </a:r>
             <a:endParaRPr lang="en-US" dirty="0"/>
           </a:p>
@@ -950,7 +949,7 @@
           <a:p>
             <a:r>
               <a:rPr lang="en-US" dirty="0"/>
-              <a:t>Correct the "same format" framing head-on — this course's own lesson-plan notes exist specifically because instructors kept saying "same as the final" and it isn't. Also correct a second, easy-to-repeat mistake: don't say "W19 is 25% of the final grade" — the 25% is the combined W18+W19 average; W19 alone is roughly half that. And don't imply DevSecOps/Capstone show up in W19 either — neither ctf.md nor the mock ever tests them, they're W18-written-only. Run mock-ctf.md / CTF pool, incl. a binary (toolbox container) + LLM challenge. Budget: 150 min per AGENDA (quiz 30 + Jeopardy 75 + break 15 + mock 150 + debrief 30 = 300 total) — not 90, that's a 60-min undercount that will visibly break the room's pacing. ~150 min.</a:t>
+              <a:t>State scope + logistics clearly — 10-15, not 10-16 (this was deliberately corrected in exam.md, don't reintroduce the old range here). W19's demo format changed too: pre-recorded + async grading, because the old live-demo format can't fit N≈80-120 students into a 90-min block. Remind teams the W19 demo is graded — bring a runnable project + the video. ~3 min.</a:t>
             </a:r>
             <a:endParaRPr lang="en-US" dirty="0"/>
           </a:p>
@@ -1038,7 +1037,7 @@
           <a:p>
             <a:r>
               <a:rPr lang="en-US" dirty="0"/>
-              <a:t>State scope + logistics clearly — 10-15, not 10-16 (this was deliberately corrected in exam.md, don't reintroduce the old range here). W19's demo format changed too: pre-recorded + async grading, because the old live-demo format can't fit N≈80-120 students into a 90-min block. Remind teams the W19 demo is graded — bring a runnable project + the video. ~3 min.</a:t>
+              <a:t>Close: checklist of what to bring to W19; confirm project repos run.</a:t>
             </a:r>
             <a:endParaRPr lang="en-US" dirty="0"/>
           </a:p>
@@ -1062,94 +1061,6 @@
             <a:fld id="{F7021451-1387-4CA6-816F-3879F97B5CBC}" type="slidenum">
               <a:rPr lang="en-US"/>
               <a:t>7</a:t>
-            </a:fld>
-            <a:endParaRPr lang="en-US"/>
-          </a:p>
-        </p:txBody>
-      </p:sp>
-    </p:spTree>
-    <p:extLst>
-      <p:ext uri="{BB962C8B-B14F-4D97-AF65-F5344CB8AC3E}">
-        <p14:creationId xmlns:p14="http://schemas.microsoft.com/office/powerpoint/2010/main" val="1024086991"/>
-      </p:ext>
-    </p:extLst>
-  </p:cSld>
-  <p:clrMapOvr>
-    <a:masterClrMapping/>
-  </p:clrMapOvr>
-</p:notes>
-</file>
-
-<file path=ppt/notesSlides/notesSlide8.xml><?xml version="1.0" encoding="utf-8"?>
-<p:notes xmlns:a="http://schemas.openxmlformats.org/drawingml/2006/main" xmlns:r="http://schemas.openxmlformats.org/officeDocument/2006/relationships" xmlns:p="http://schemas.openxmlformats.org/presentationml/2006/main">
-  <p:cSld>
-    <p:spTree>
-      <p:nvGrpSpPr>
-        <p:cNvPr id="1" name=""/>
-        <p:cNvGrpSpPr/>
-        <p:nvPr/>
-      </p:nvGrpSpPr>
-      <p:grpSpPr>
-        <a:xfrm>
-          <a:off x="0" y="0"/>
-          <a:ext cx="0" cy="0"/>
-          <a:chOff x="0" y="0"/>
-          <a:chExt cx="0" cy="0"/>
-        </a:xfrm>
-      </p:grpSpPr>
-      <p:sp>
-        <p:nvSpPr>
-          <p:cNvPr id="2" name="Slide Image Placeholder 1"/>
-          <p:cNvSpPr>
-            <a:spLocks noGrp="1" noRot="1" noChangeAspect="1"/>
-          </p:cNvSpPr>
-          <p:nvPr>
-            <p:ph type="sldImg"/>
-          </p:nvPr>
-        </p:nvSpPr>
-        <p:spPr/>
-      </p:sp>
-      <p:sp>
-        <p:nvSpPr>
-          <p:cNvPr id="3" name="Notes Placeholder 2"/>
-          <p:cNvSpPr>
-            <a:spLocks noGrp="1"/>
-          </p:cNvSpPr>
-          <p:nvPr>
-            <p:ph type="body" idx="1"/>
-          </p:nvPr>
-        </p:nvSpPr>
-        <p:spPr/>
-        <p:txBody>
-          <a:bodyPr/>
-          <a:lstStyle/>
-          <a:p>
-            <a:r>
-              <a:rPr lang="en-US" dirty="0"/>
-              <a:t>Close: checklist of what to bring to W19; confirm project repos run.</a:t>
-            </a:r>
-            <a:endParaRPr lang="en-US" dirty="0"/>
-          </a:p>
-        </p:txBody>
-      </p:sp>
-      <p:sp>
-        <p:nvSpPr>
-          <p:cNvPr id="4" name="Slide Number Placeholder 3"/>
-          <p:cNvSpPr>
-            <a:spLocks noGrp="1"/>
-          </p:cNvSpPr>
-          <p:nvPr>
-            <p:ph type="sldNum" sz="quarter" idx="10"/>
-          </p:nvPr>
-        </p:nvSpPr>
-        <p:spPr/>
-        <p:txBody>
-          <a:bodyPr/>
-          <a:lstStyle/>
-          <a:p>
-            <a:fld id="{F7021451-1387-4CA6-816F-3879F97B5CBC}" type="slidenum">
-              <a:rPr lang="en-US"/>
-              <a:t>8</a:t>
             </a:fld>
             <a:endParaRPr lang="en-US"/>
           </a:p>
@@ -1501,7 +1412,7 @@
       </p:grpSpPr>
       <p:pic>
         <p:nvPicPr>
-          <p:cNvPr id="2" name="Image 0" descr="/private/tmp/claude-501/-Users-pop7-Library-CloudStorage-OneDrive-MonsterConnectCo--Ltd-Lecture-KOSEN69---software-security/f63a82af-e1ad-40ed-89c4-03c6ca776e3f/scratchpad/lq-docs/slides/pptx/assets/logo-small.png">    </p:cNvPr>
+          <p:cNvPr id="2" name="Image 0" descr="/private/tmp/claude-501/-Users-pop7-Library-CloudStorage-OneDrive-MonsterConnectCo--Ltd-Lecture-KOSEN69---software-security/99bf711f-59ac-440f-b5a8-deb60f96a23e/scratchpad/swsec/slides/pptx/assets/logo-small.png">    </p:cNvPr>
           <p:cNvPicPr>
             <a:picLocks noChangeAspect="1"/>
           </p:cNvPicPr>
@@ -1922,7 +1833,7 @@
       </p:sp>
       <p:pic>
         <p:nvPicPr>
-          <p:cNvPr id="8" name="Image 1" descr="/private/tmp/claude-501/-Users-pop7-Library-CloudStorage-OneDrive-MonsterConnectCo--Ltd-Lecture-KOSEN69---software-security/f63a82af-e1ad-40ed-89c4-03c6ca776e3f/scratchpad/lq-docs/slides/pptx/assets/logo-small.png">    </p:cNvPr>
+          <p:cNvPr id="8" name="Image 1" descr="/private/tmp/claude-501/-Users-pop7-Library-CloudStorage-OneDrive-MonsterConnectCo--Ltd-Lecture-KOSEN69---software-security/99bf711f-59ac-440f-b5a8-deb60f96a23e/scratchpad/swsec/slides/pptx/assets/logo-small.png">    </p:cNvPr>
           <p:cNvPicPr>
             <a:picLocks noChangeAspect="1"/>
           </p:cNvPicPr>
@@ -2131,7 +2042,7 @@
       </p:sp>
       <p:pic>
         <p:nvPicPr>
-          <p:cNvPr id="7" name="Image 2" descr="/private/tmp/claude-501/-Users-pop7-Library-CloudStorage-OneDrive-MonsterConnectCo--Ltd-Lecture-KOSEN69---software-security/f63a82af-e1ad-40ed-89c4-03c6ca776e3f/scratchpad/lq-docs/slides/pptx/assets/logo-small.png">    </p:cNvPr>
+          <p:cNvPr id="7" name="Image 2" descr="/private/tmp/claude-501/-Users-pop7-Library-CloudStorage-OneDrive-MonsterConnectCo--Ltd-Lecture-KOSEN69---software-security/99bf711f-59ac-440f-b5a8-deb60f96a23e/scratchpad/swsec/slides/pptx/assets/logo-small.png">    </p:cNvPr>
           <p:cNvPicPr>
             <a:picLocks noChangeAspect="1"/>
           </p:cNvPicPr>
@@ -2759,7 +2670,7 @@
       </p:sp>
       <p:pic>
         <p:nvPicPr>
-          <p:cNvPr id="8" name="Image 1" descr="/private/tmp/claude-501/-Users-pop7-Library-CloudStorage-OneDrive-MonsterConnectCo--Ltd-Lecture-KOSEN69---software-security/f63a82af-e1ad-40ed-89c4-03c6ca776e3f/scratchpad/lq-docs/slides/pptx/assets/logo-small.png">    </p:cNvPr>
+          <p:cNvPr id="8" name="Image 1" descr="/private/tmp/claude-501/-Users-pop7-Library-CloudStorage-OneDrive-MonsterConnectCo--Ltd-Lecture-KOSEN69---software-security/99bf711f-59ac-440f-b5a8-deb60f96a23e/scratchpad/swsec/slides/pptx/assets/logo-small.png">    </p:cNvPr>
           <p:cNvPicPr>
             <a:picLocks noChangeAspect="1"/>
           </p:cNvPicPr>
@@ -2953,11 +2864,11 @@
         <p:spPr>
           <a:xfrm>
             <a:off x="457200" y="1965960"/>
-            <a:ext cx="8229600" cy="2212848"/>
+            <a:ext cx="8229600" cy="2523744"/>
           </a:xfrm>
           <a:prstGeom prst="roundRect">
             <a:avLst>
-              <a:gd name="adj" fmla="val 3306"/>
+              <a:gd name="adj" fmla="val 2899"/>
             </a:avLst>
           </a:prstGeom>
           <a:solidFill>
@@ -2982,7 +2893,7 @@
         <p:spPr>
           <a:xfrm>
             <a:off x="731520" y="2075688"/>
-            <a:ext cx="7680960" cy="1993392"/>
+            <a:ext cx="7680960" cy="2304288"/>
           </a:xfrm>
           <a:prstGeom prst="rect">
             <a:avLst/>
@@ -3012,7 +2923,7 @@
                 <a:ea typeface="Calibri" pitchFamily="34" charset="-122"/>
                 <a:cs typeface="Calibri" pitchFamily="34" charset="-120"/>
               </a:rPr>
-              <a:t>8 challenges here vs. 12 in W19; Web is 1 optional callback here vs. 5 separate W19 challenges (60/150 pts)</a:t>
+              <a:t>8 challenges here vs. 14 in W19; Web is 1 optional callback here vs. 5 separate W19 challenges (60/165 pts)</a:t>
             </a:r>
             <a:endParaRPr lang="en-US" sz="1400" dirty="0"/>
           </a:p>
@@ -3033,7 +2944,7 @@
                 <a:ea typeface="Calibri" pitchFamily="34" charset="-122"/>
                 <a:cs typeface="Calibri" pitchFamily="34" charset="-120"/>
               </a:rPr>
-              <a:t>No DevSecOps or Capstone challenge in either the mock or the W19 CTF (both stop at Week 14) — that content is examined on the Week 18 written paper instead (15/100 pts)</a:t>
+              <a:t>No DevSecOps challenge in the mock; W19 has one — #14 Break the Build (15 pts, Week 15) — and DevSecOps is also on the Week 18 written paper (15/100 pts)</a:t>
             </a:r>
             <a:endParaRPr lang="en-US" sz="1400" dirty="0"/>
           </a:p>
@@ -3058,6 +2969,27 @@
             </a:r>
             <a:endParaRPr lang="en-US" sz="1400" dirty="0"/>
           </a:p>
+          <a:p>
+            <a:pPr marL="342900" indent="-342900">
+              <a:spcAft>
+                <a:spcPts val="600"/>
+              </a:spcAft>
+              <a:buSzPct val="100000"/>
+              <a:buChar char="•"/>
+            </a:pPr>
+            <a:r>
+              <a:rPr lang="en-US" sz="1400" dirty="0">
+                <a:solidFill>
+                  <a:srgbClr val="1F2937"/>
+                </a:solidFill>
+                <a:latin typeface="Calibri" pitchFamily="34" charset="0"/>
+                <a:ea typeface="Calibri" pitchFamily="34" charset="-122"/>
+                <a:cs typeface="Calibri" pitchFamily="34" charset="-120"/>
+              </a:rPr>
+              <a:t>Team-based, leaderboard — the team mechanic and general flow ARE the same, just not the coverage</a:t>
+            </a:r>
+            <a:endParaRPr lang="en-US" sz="1400" dirty="0"/>
+          </a:p>
         </p:txBody>
       </p:sp>
       <p:sp>
@@ -3101,7 +3033,7 @@
       </p:sp>
       <p:pic>
         <p:nvPicPr>
-          <p:cNvPr id="9" name="Image 1" descr="/private/tmp/claude-501/-Users-pop7-Library-CloudStorage-OneDrive-MonsterConnectCo--Ltd-Lecture-KOSEN69---software-security/f63a82af-e1ad-40ed-89c4-03c6ca776e3f/scratchpad/lq-docs/slides/pptx/assets/logo-small.png">    </p:cNvPr>
+          <p:cNvPr id="9" name="Image 1" descr="/private/tmp/claude-501/-Users-pop7-Library-CloudStorage-OneDrive-MonsterConnectCo--Ltd-Lecture-KOSEN69---software-security/99bf711f-59ac-440f-b5a8-deb60f96a23e/scratchpad/swsec/slides/pptx/assets/logo-small.png">    </p:cNvPr>
           <p:cNvPicPr>
             <a:picLocks noChangeAspect="1"/>
           </p:cNvPicPr>
@@ -3239,7 +3171,7 @@
                 <a:ea typeface="Arial" pitchFamily="34" charset="-122"/>
                 <a:cs typeface="Arial" pitchFamily="34" charset="-120"/>
               </a:rPr>
-              <a:t>🧪 Mock final CTF (cont.)</a:t>
+              <a:t>Exam scope reminder</a:t>
             </a:r>
             <a:endParaRPr lang="en-US" sz="2600" dirty="0"/>
           </a:p>
@@ -3254,11 +3186,11 @@
         <p:spPr>
           <a:xfrm>
             <a:off x="457200" y="1325880"/>
-            <a:ext cx="8229600" cy="786384"/>
+            <a:ext cx="8229600" cy="1298448"/>
           </a:xfrm>
           <a:prstGeom prst="roundRect">
             <a:avLst>
-              <a:gd name="adj" fmla="val 9302"/>
+              <a:gd name="adj" fmla="val 5634"/>
             </a:avLst>
           </a:prstGeom>
           <a:solidFill>
@@ -3283,7 +3215,7 @@
         <p:spPr>
           <a:xfrm>
             <a:off x="731520" y="1435608"/>
-            <a:ext cx="7680960" cy="566928"/>
+            <a:ext cx="7680960" cy="1078992"/>
           </a:xfrm>
           <a:prstGeom prst="rect">
             <a:avLst/>
@@ -3313,7 +3245,28 @@
                 <a:ea typeface="Calibri" pitchFamily="34" charset="-122"/>
                 <a:cs typeface="Calibri" pitchFamily="34" charset="-120"/>
               </a:rPr>
-              <a:t>Team-based, leaderboard — the team mechanic and general flow ARE the same, just not the coverage</a:t>
+              <a:t>Wk 18 written: cumulative, emphasis on Weeks 10–15 (Week 16 capstone isn't separately examined)</a:t>
+            </a:r>
+            <a:endParaRPr lang="en-US" sz="1400" dirty="0"/>
+          </a:p>
+          <a:p>
+            <a:pPr marL="342900" indent="-342900">
+              <a:spcAft>
+                <a:spcPts val="600"/>
+              </a:spcAft>
+              <a:buSzPct val="100000"/>
+              <a:buChar char="•"/>
+            </a:pPr>
+            <a:r>
+              <a:rPr lang="en-US" sz="1400" dirty="0">
+                <a:solidFill>
+                  <a:srgbClr val="1F2937"/>
+                </a:solidFill>
+                <a:latin typeface="Calibri" pitchFamily="34" charset="0"/>
+                <a:ea typeface="Calibri" pitchFamily="34" charset="-122"/>
+                <a:cs typeface="Calibri" pitchFamily="34" charset="-120"/>
+              </a:rPr>
+              <a:t>Wk 19: capstone CTF tournament + final project demos (video walkthrough linked in the report, due with it; live Q&amp;A only if the instructor calls your team)</a:t>
             </a:r>
             <a:endParaRPr lang="en-US" sz="1400" dirty="0"/>
           </a:p>
@@ -3360,7 +3313,7 @@
       </p:sp>
       <p:pic>
         <p:nvPicPr>
-          <p:cNvPr id="8" name="Image 1" descr="/private/tmp/claude-501/-Users-pop7-Library-CloudStorage-OneDrive-MonsterConnectCo--Ltd-Lecture-KOSEN69---software-security/f63a82af-e1ad-40ed-89c4-03c6ca776e3f/scratchpad/lq-docs/slides/pptx/assets/logo-small.png">    </p:cNvPr>
+          <p:cNvPr id="8" name="Image 1" descr="/private/tmp/claude-501/-Users-pop7-Library-CloudStorage-OneDrive-MonsterConnectCo--Ltd-Lecture-KOSEN69---software-security/99bf711f-59ac-440f-b5a8-deb60f96a23e/scratchpad/swsec/slides/pptx/assets/logo-small.png">    </p:cNvPr>
           <p:cNvPicPr>
             <a:picLocks noChangeAspect="1"/>
           </p:cNvPicPr>
@@ -3416,286 +3369,6 @@
       </p:grpSpPr>
       <p:sp>
         <p:nvSpPr>
-          <p:cNvPr id="2" name="Shape 0"/>
-          <p:cNvSpPr/>
-          <p:nvPr/>
-        </p:nvSpPr>
-        <p:spPr>
-          <a:xfrm>
-            <a:off x="457200" y="384048"/>
-            <a:ext cx="530352" cy="530352"/>
-          </a:xfrm>
-          <a:prstGeom prst="ellipse">
-            <a:avLst/>
-          </a:prstGeom>
-          <a:solidFill>
-            <a:srgbClr val="E35205"/>
-          </a:solidFill>
-          <a:ln/>
-          <a:effectLst>
-            <a:outerShdw sx="100000" sy="100000" kx="0" ky="0" algn="bl" rotWithShape="0" blurRad="76200" dist="25400" dir="5400000">
-              <a:srgbClr val="000000">
-                <a:alpha val="12000"/>
-              </a:srgbClr>
-            </a:outerShdw>
-          </a:effectLst>
-        </p:spPr>
-      </p:sp>
-      <p:pic>
-        <p:nvPicPr>
-          <p:cNvPr id="3" name="Image 0" descr="preencoded.png">    </p:cNvPr>
-          <p:cNvPicPr>
-            <a:picLocks noChangeAspect="1"/>
-          </p:cNvPicPr>
-          <p:nvPr/>
-        </p:nvPicPr>
-        <p:blipFill>
-          <a:blip r:embed="rId1"/>
-          <a:stretch>
-            <a:fillRect/>
-          </a:stretch>
-        </p:blipFill>
-        <p:spPr>
-          <a:xfrm>
-            <a:off x="594360" y="521208"/>
-            <a:ext cx="256032" cy="256032"/>
-          </a:xfrm>
-          <a:prstGeom prst="rect">
-            <a:avLst/>
-          </a:prstGeom>
-        </p:spPr>
-      </p:pic>
-      <p:sp>
-        <p:nvSpPr>
-          <p:cNvPr id="4" name="Text 1"/>
-          <p:cNvSpPr/>
-          <p:nvPr/>
-        </p:nvSpPr>
-        <p:spPr>
-          <a:xfrm>
-            <a:off x="1143000" y="329184"/>
-            <a:ext cx="7498080" cy="603504"/>
-          </a:xfrm>
-          <a:prstGeom prst="rect">
-            <a:avLst/>
-          </a:prstGeom>
-          <a:noFill/>
-          <a:ln/>
-        </p:spPr>
-        <p:txBody>
-          <a:bodyPr wrap="square" lIns="0" tIns="0" rIns="0" bIns="0" rtlCol="0" anchor="ctr"/>
-          <a:lstStyle/>
-          <a:p>
-            <a:pPr indent="0" marL="0">
-              <a:buNone/>
-            </a:pPr>
-            <a:r>
-              <a:rPr lang="en-US" sz="2600" b="1" dirty="0">
-                <a:solidFill>
-                  <a:srgbClr val="1F2937"/>
-                </a:solidFill>
-                <a:latin typeface="Arial" pitchFamily="34" charset="0"/>
-                <a:ea typeface="Arial" pitchFamily="34" charset="-122"/>
-                <a:cs typeface="Arial" pitchFamily="34" charset="-120"/>
-              </a:rPr>
-              <a:t>Exam scope reminder</a:t>
-            </a:r>
-            <a:endParaRPr lang="en-US" sz="2600" dirty="0"/>
-          </a:p>
-        </p:txBody>
-      </p:sp>
-      <p:sp>
-        <p:nvSpPr>
-          <p:cNvPr id="5" name="Shape 2"/>
-          <p:cNvSpPr/>
-          <p:nvPr/>
-        </p:nvSpPr>
-        <p:spPr>
-          <a:xfrm>
-            <a:off x="457200" y="1325880"/>
-            <a:ext cx="8229600" cy="1298448"/>
-          </a:xfrm>
-          <a:prstGeom prst="roundRect">
-            <a:avLst>
-              <a:gd name="adj" fmla="val 5634"/>
-            </a:avLst>
-          </a:prstGeom>
-          <a:solidFill>
-            <a:srgbClr val="F1F5F9"/>
-          </a:solidFill>
-          <a:ln/>
-          <a:effectLst>
-            <a:outerShdw sx="100000" sy="100000" kx="0" ky="0" algn="bl" rotWithShape="0" blurRad="76200" dist="25400" dir="5400000">
-              <a:srgbClr val="000000">
-                <a:alpha val="12000"/>
-              </a:srgbClr>
-            </a:outerShdw>
-          </a:effectLst>
-        </p:spPr>
-      </p:sp>
-      <p:sp>
-        <p:nvSpPr>
-          <p:cNvPr id="6" name="Text 3"/>
-          <p:cNvSpPr/>
-          <p:nvPr/>
-        </p:nvSpPr>
-        <p:spPr>
-          <a:xfrm>
-            <a:off x="731520" y="1435608"/>
-            <a:ext cx="7680960" cy="1078992"/>
-          </a:xfrm>
-          <a:prstGeom prst="rect">
-            <a:avLst/>
-          </a:prstGeom>
-          <a:noFill/>
-          <a:ln/>
-        </p:spPr>
-        <p:txBody>
-          <a:bodyPr wrap="square" lIns="0" tIns="0" rIns="0" bIns="0" rtlCol="0" anchor="t">
-            <a:normAutofit/>
-          </a:bodyPr>
-          <a:lstStyle/>
-          <a:p>
-            <a:pPr marL="342900" indent="-342900">
-              <a:spcAft>
-                <a:spcPts val="600"/>
-              </a:spcAft>
-              <a:buSzPct val="100000"/>
-              <a:buChar char="•"/>
-            </a:pPr>
-            <a:r>
-              <a:rPr lang="en-US" sz="1400" dirty="0">
-                <a:solidFill>
-                  <a:srgbClr val="1F2937"/>
-                </a:solidFill>
-                <a:latin typeface="Calibri" pitchFamily="34" charset="0"/>
-                <a:ea typeface="Calibri" pitchFamily="34" charset="-122"/>
-                <a:cs typeface="Calibri" pitchFamily="34" charset="-120"/>
-              </a:rPr>
-              <a:t>Wk 18 written: cumulative, emphasis on Weeks 10–15 (Week 16 capstone isn't separately examined)</a:t>
-            </a:r>
-            <a:endParaRPr lang="en-US" sz="1400" dirty="0"/>
-          </a:p>
-          <a:p>
-            <a:pPr marL="342900" indent="-342900">
-              <a:spcAft>
-                <a:spcPts val="600"/>
-              </a:spcAft>
-              <a:buSzPct val="100000"/>
-              <a:buChar char="•"/>
-            </a:pPr>
-            <a:r>
-              <a:rPr lang="en-US" sz="1400" dirty="0">
-                <a:solidFill>
-                  <a:srgbClr val="1F2937"/>
-                </a:solidFill>
-                <a:latin typeface="Calibri" pitchFamily="34" charset="0"/>
-                <a:ea typeface="Calibri" pitchFamily="34" charset="-122"/>
-                <a:cs typeface="Calibri" pitchFamily="34" charset="-120"/>
-              </a:rPr>
-              <a:t>Wk 19: capstone CTF tournament + final project demos (video walkthrough linked in the report, due with it; live Q&amp;A only if the instructor calls your team)</a:t>
-            </a:r>
-            <a:endParaRPr lang="en-US" sz="1400" dirty="0"/>
-          </a:p>
-        </p:txBody>
-      </p:sp>
-      <p:sp>
-        <p:nvSpPr>
-          <p:cNvPr id="7" name="Text 4"/>
-          <p:cNvSpPr/>
-          <p:nvPr/>
-        </p:nvSpPr>
-        <p:spPr>
-          <a:xfrm>
-            <a:off x="457200" y="4800600"/>
-            <a:ext cx="6949440" cy="274320"/>
-          </a:xfrm>
-          <a:prstGeom prst="rect">
-            <a:avLst/>
-          </a:prstGeom>
-          <a:noFill/>
-          <a:ln/>
-        </p:spPr>
-        <p:txBody>
-          <a:bodyPr wrap="square" lIns="0" tIns="0" rIns="0" bIns="0" rtlCol="0" anchor="ctr"/>
-          <a:lstStyle/>
-          <a:p>
-            <a:pPr indent="0" marL="0">
-              <a:buNone/>
-            </a:pPr>
-            <a:r>
-              <a:rPr lang="en-US" sz="900" dirty="0">
-                <a:solidFill>
-                  <a:srgbClr val="64748B"/>
-                </a:solidFill>
-                <a:latin typeface="Calibri" pitchFamily="34" charset="0"/>
-                <a:ea typeface="Calibri" pitchFamily="34" charset="-122"/>
-                <a:cs typeface="Calibri" pitchFamily="34" charset="-120"/>
-              </a:rPr>
-              <a:t>Software Security · Week 17 · Review</a:t>
-            </a:r>
-            <a:endParaRPr lang="en-US" sz="900" dirty="0"/>
-          </a:p>
-        </p:txBody>
-      </p:sp>
-      <p:pic>
-        <p:nvPicPr>
-          <p:cNvPr id="8" name="Image 1" descr="/private/tmp/claude-501/-Users-pop7-Library-CloudStorage-OneDrive-MonsterConnectCo--Ltd-Lecture-KOSEN69---software-security/f63a82af-e1ad-40ed-89c4-03c6ca776e3f/scratchpad/lq-docs/slides/pptx/assets/logo-small.png">    </p:cNvPr>
-          <p:cNvPicPr>
-            <a:picLocks noChangeAspect="1"/>
-          </p:cNvPicPr>
-          <p:nvPr/>
-        </p:nvPicPr>
-        <p:blipFill>
-          <a:blip r:embed="rId2"/>
-          <a:stretch>
-            <a:fillRect/>
-          </a:stretch>
-        </p:blipFill>
-        <p:spPr>
-          <a:xfrm>
-            <a:off x="7882128" y="4700016"/>
-            <a:ext cx="768096" cy="356616"/>
-          </a:xfrm>
-          <a:prstGeom prst="rect">
-            <a:avLst/>
-          </a:prstGeom>
-        </p:spPr>
-      </p:pic>
-    </p:spTree>
-  </p:cSld>
-  <p:clrMapOvr>
-    <a:masterClrMapping/>
-  </p:clrMapOvr>
-</p:sld>
-</file>
-
-<file path=ppt/slides/slide8.xml><?xml version="1.0" encoding="utf-8"?>
-<p:sld xmlns:a="http://schemas.openxmlformats.org/drawingml/2006/main" xmlns:r="http://schemas.openxmlformats.org/officeDocument/2006/relationships" xmlns:p="http://schemas.openxmlformats.org/presentationml/2006/main">
-  <p:cSld name="Slide 8">
-    <p:bg>
-      <p:bgPr>
-        <a:solidFill>
-          <a:srgbClr val="FFFFFF"/>
-        </a:solidFill>
-      </p:bgPr>
-    </p:bg>
-    <p:spTree>
-      <p:nvGrpSpPr>
-        <p:cNvPr id="1" name=""/>
-        <p:cNvGrpSpPr/>
-        <p:nvPr/>
-      </p:nvGrpSpPr>
-      <p:grpSpPr>
-        <a:xfrm>
-          <a:off x="0" y="0"/>
-          <a:ext cx="0" cy="0"/>
-          <a:chOff x="0" y="0"/>
-          <a:chExt cx="0" cy="0"/>
-        </a:xfrm>
-      </p:grpSpPr>
-      <p:sp>
-        <p:nvSpPr>
           <p:cNvPr id="2" name="Text 0"/>
           <p:cNvSpPr/>
           <p:nvPr/>
@@ -3774,7 +3447,7 @@
       </p:sp>
       <p:pic>
         <p:nvPicPr>
-          <p:cNvPr id="4" name="Image 0" descr="/private/tmp/claude-501/-Users-pop7-Library-CloudStorage-OneDrive-MonsterConnectCo--Ltd-Lecture-KOSEN69---software-security/f63a82af-e1ad-40ed-89c4-03c6ca776e3f/scratchpad/lq-docs/slides/pptx/assets/logo-small.png">    </p:cNvPr>
+          <p:cNvPr id="4" name="Image 0" descr="/private/tmp/claude-501/-Users-pop7-Library-CloudStorage-OneDrive-MonsterConnectCo--Ltd-Lecture-KOSEN69---software-security/99bf711f-59ac-440f-b5a8-deb60f96a23e/scratchpad/swsec/slides/pptx/assets/logo-small.png">    </p:cNvPr>
           <p:cNvPicPr>
             <a:picLocks noChangeAspect="1"/>
           </p:cNvPicPr>
